--- a/Foundation_F6/Workshop/F6-W02_Apply_Workshop_L03-L04_A_Train_Journey_to_York.pptx
+++ b/Foundation_F6/Workshop/F6-W02_Apply_Workshop_L03-L04_A_Train_Journey_to_York.pptx
@@ -7435,7 +7435,7 @@
                 <a:latin typeface="Calibri" pitchFamily="34" charset="0"/>
                 <a:cs typeface="Amiri" pitchFamily="2" charset="-78"/>
               </a:rPr>
-              <a:t>Odd numbers come from F6-L03, even numbers from F6-L04. Core: a full sentence from the starter. Develop: add the “more” part. Stretch: link two answers with </a:t>
+              <a:t>Odd numbers come from F6-L03, even numbers from F6-L04. Core: a full sentence from the starter. Develop: add the “more” part. Stretch: link two answers with ‏</a:t>
             </a:r>
             <a:pPr algn="l" indent="0" marL="0">
               <a:buNone/>
@@ -7462,7 +7462,7 @@
                 <a:latin typeface="Calibri" pitchFamily="34" charset="0"/>
                 <a:cs typeface="Amiri" pitchFamily="2" charset="-78"/>
               </a:rPr>
-              <a:t>, </a:t>
+              <a:t>‏, ‏</a:t>
             </a:r>
             <a:pPr algn="l" indent="0" marL="0">
               <a:buNone/>
@@ -7489,7 +7489,7 @@
                 <a:latin typeface="Calibri" pitchFamily="34" charset="0"/>
                 <a:cs typeface="Amiri" pitchFamily="2" charset="-78"/>
               </a:rPr>
-              <a:t> or </a:t>
+              <a:t>‏ or ‏</a:t>
             </a:r>
             <a:pPr algn="l" indent="0" marL="0">
               <a:buNone/>
@@ -7516,7 +7516,7 @@
                 <a:latin typeface="Calibri" pitchFamily="34" charset="0"/>
                 <a:cs typeface="Amiri" pitchFamily="2" charset="-78"/>
               </a:rPr>
-              <a:t>. Swap after each question.</a:t>
+              <a:t>‏. Swap after each question.</a:t>
             </a:r>
             <a:endParaRPr lang="en-US" sz="1100" dirty="0"/>
           </a:p>
@@ -10839,7 +10839,7 @@
                 <a:latin typeface="Calibri" pitchFamily="34" charset="0"/>
                 <a:cs typeface="Amiri" pitchFamily="2" charset="-78"/>
               </a:rPr>
-              <a:t>Add a journey: </a:t>
+              <a:t>Add a journey: ‏</a:t>
             </a:r>
             <a:pPr algn="l" indent="0" marL="0">
               <a:buNone/>
@@ -10893,7 +10893,7 @@
                 <a:latin typeface="Calibri" pitchFamily="34" charset="0"/>
                 <a:cs typeface="Amiri" pitchFamily="2" charset="-78"/>
               </a:rPr>
-              <a:t> …</a:t>
+              <a:t> …‏</a:t>
             </a:r>
             <a:endParaRPr lang="en-US" sz="1150" dirty="0"/>
           </a:p>
@@ -17392,7 +17392,7 @@
                 <a:latin typeface="Calibri" pitchFamily="34" charset="0"/>
                 <a:cs typeface="Amiri" pitchFamily="2" charset="-78"/>
               </a:rPr>
-              <a:t>By bus = </a:t>
+              <a:t>By bus = ‏</a:t>
             </a:r>
             <a:pPr algn="l" indent="0" marL="0">
               <a:buNone/>
@@ -17419,7 +17419,7 @@
                 <a:latin typeface="Calibri" pitchFamily="34" charset="0"/>
                 <a:cs typeface="Amiri" pitchFamily="2" charset="-78"/>
               </a:rPr>
-              <a:t>.</a:t>
+              <a:t>‏.</a:t>
             </a:r>
             <a:endParaRPr lang="en-US" sz="1150" dirty="0"/>
           </a:p>
@@ -17630,7 +17630,7 @@
                 <a:latin typeface="Calibri" pitchFamily="34" charset="0"/>
                 <a:cs typeface="Amiri" pitchFamily="2" charset="-78"/>
               </a:rPr>
-              <a:t>Feminine subject → </a:t>
+              <a:t>Feminine subject → ‏</a:t>
             </a:r>
             <a:pPr algn="l" indent="0" marL="0">
               <a:buNone/>
@@ -17657,7 +17657,7 @@
                 <a:latin typeface="Calibri" pitchFamily="34" charset="0"/>
                 <a:cs typeface="Amiri" pitchFamily="2" charset="-78"/>
               </a:rPr>
-              <a:t>.</a:t>
+              <a:t>‏.</a:t>
             </a:r>
             <a:endParaRPr lang="en-US" sz="1150" dirty="0"/>
           </a:p>
@@ -17868,7 +17868,7 @@
                 <a:latin typeface="Calibri" pitchFamily="34" charset="0"/>
                 <a:cs typeface="Amiri" pitchFamily="2" charset="-78"/>
               </a:rPr>
-              <a:t>On foot = </a:t>
+              <a:t>On foot = ‏</a:t>
             </a:r>
             <a:pPr algn="l" indent="0" marL="0">
               <a:buNone/>
@@ -17895,7 +17895,7 @@
                 <a:latin typeface="Calibri" pitchFamily="34" charset="0"/>
                 <a:cs typeface="Amiri" pitchFamily="2" charset="-78"/>
               </a:rPr>
-              <a:t> (no preposition).</a:t>
+              <a:t>‏ (no preposition).</a:t>
             </a:r>
             <a:endParaRPr lang="en-US" sz="1150" dirty="0"/>
           </a:p>
@@ -20018,7 +20018,7 @@
                 <a:latin typeface="Calibri" pitchFamily="34" charset="0"/>
                 <a:cs typeface="Amiri" pitchFamily="2" charset="-78"/>
               </a:rPr>
-              <a:t>☐  At least one </a:t>
+              <a:t>☐  At least one ‏</a:t>
             </a:r>
             <a:pPr algn="l" indent="0" marL="0">
               <a:buNone/>
@@ -20045,7 +20045,7 @@
                 <a:latin typeface="Calibri" pitchFamily="34" charset="0"/>
                 <a:cs typeface="Amiri" pitchFamily="2" charset="-78"/>
               </a:rPr>
-              <a:t> and one </a:t>
+              <a:t>‏ and one ‏</a:t>
             </a:r>
             <a:pPr algn="l" indent="0" marL="0">
               <a:buNone/>
@@ -20072,7 +20072,7 @@
                 <a:latin typeface="Calibri" pitchFamily="34" charset="0"/>
                 <a:cs typeface="Amiri" pitchFamily="2" charset="-78"/>
               </a:rPr>
-              <a:t> (Develop).</a:t>
+              <a:t>‏ (Develop).</a:t>
             </a:r>
             <a:endParaRPr lang="en-US" sz="1200" dirty="0"/>
           </a:p>
@@ -23396,7 +23396,7 @@
                 <a:latin typeface="Calibri" pitchFamily="34" charset="0"/>
                 <a:cs typeface="Amiri" pitchFamily="2" charset="-78"/>
               </a:rPr>
-              <a:t>use bi- + vehicle, </a:t>
+              <a:t>use bi- + vehicle, ‏</a:t>
             </a:r>
             <a:pPr algn="l" indent="0" marL="0">
               <a:buNone/>
@@ -23423,7 +23423,7 @@
                 <a:latin typeface="Calibri" pitchFamily="34" charset="0"/>
                 <a:cs typeface="Amiri" pitchFamily="2" charset="-78"/>
               </a:rPr>
-              <a:t> or </a:t>
+              <a:t>‏ or ‏</a:t>
             </a:r>
             <a:pPr algn="l" indent="0" marL="0">
               <a:buNone/>
@@ -23450,7 +23450,7 @@
                 <a:latin typeface="Calibri" pitchFamily="34" charset="0"/>
                 <a:cs typeface="Amiri" pitchFamily="2" charset="-78"/>
               </a:rPr>
-              <a:t> correctly?</a:t>
+              <a:t>‏ correctly?</a:t>
             </a:r>
             <a:endParaRPr lang="en-US" sz="1100" dirty="0"/>
           </a:p>
@@ -23674,7 +23674,7 @@
                 <a:latin typeface="Calibri" pitchFamily="34" charset="0"/>
                 <a:cs typeface="Amiri" pitchFamily="2" charset="-78"/>
               </a:rPr>
-              <a:t>use </a:t>
+              <a:t>use ‏</a:t>
             </a:r>
             <a:pPr algn="l" indent="0" marL="0">
               <a:buNone/>
@@ -23701,7 +23701,7 @@
                 <a:latin typeface="Calibri" pitchFamily="34" charset="0"/>
                 <a:cs typeface="Amiri" pitchFamily="2" charset="-78"/>
               </a:rPr>
-              <a:t> + duration correctly (dual / plural)?</a:t>
+              <a:t>‏ + duration correctly (dual / plural)?</a:t>
             </a:r>
             <a:endParaRPr lang="en-US" sz="1100" dirty="0"/>
           </a:p>
@@ -23860,7 +23860,7 @@
                 <a:latin typeface="Calibri" pitchFamily="34" charset="0"/>
                 <a:cs typeface="Amiri" pitchFamily="2" charset="-78"/>
               </a:rPr>
-              <a:t>use linking words (</a:t>
+              <a:t>use linking words (‏</a:t>
             </a:r>
             <a:pPr algn="l" indent="0" marL="0">
               <a:buNone/>
@@ -23968,7 +23968,7 @@
                 <a:latin typeface="Calibri" pitchFamily="34" charset="0"/>
                 <a:cs typeface="Amiri" pitchFamily="2" charset="-78"/>
               </a:rPr>
-              <a:t>)?</a:t>
+              <a:t>‏)?</a:t>
             </a:r>
             <a:endParaRPr lang="en-US" sz="1100" dirty="0"/>
           </a:p>
@@ -27914,7 +27914,7 @@
                 <a:latin typeface="Calibri" pitchFamily="34" charset="0"/>
                 <a:cs typeface="Amiri" pitchFamily="2" charset="-78"/>
               </a:rPr>
-              <a:t>I added reasons (</a:t>
+              <a:t>I added reasons (‏</a:t>
             </a:r>
             <a:pPr algn="l" indent="0" marL="0">
               <a:buNone/>
@@ -27941,7 +27941,7 @@
                 <a:latin typeface="Calibri" pitchFamily="34" charset="0"/>
                 <a:cs typeface="Amiri" pitchFamily="2" charset="-78"/>
               </a:rPr>
-              <a:t>) and extra details without frames.</a:t>
+              <a:t>‏) and extra details without frames.</a:t>
             </a:r>
             <a:endParaRPr lang="en-US" sz="1300" dirty="0"/>
           </a:p>
@@ -32069,7 +32069,7 @@
                 <a:latin typeface="Calibri" pitchFamily="34" charset="0"/>
                 <a:cs typeface="Amiri" pitchFamily="2" charset="-78"/>
               </a:rPr>
-              <a:t>☐  Add a reason (</a:t>
+              <a:t>☐  Add a reason (‏</a:t>
             </a:r>
             <a:pPr algn="l" indent="0" marL="0">
               <a:buNone/>
@@ -32096,7 +32096,7 @@
                 <a:latin typeface="Calibri" pitchFamily="34" charset="0"/>
                 <a:cs typeface="Amiri" pitchFamily="2" charset="-78"/>
               </a:rPr>
-              <a:t>) and an extra detail to every point.</a:t>
+              <a:t>‏) and an extra detail to every point.</a:t>
             </a:r>
             <a:endParaRPr lang="en-US" sz="1300" dirty="0"/>
           </a:p>
@@ -33617,7 +33617,7 @@
                 <a:latin typeface="Calibri" pitchFamily="34" charset="0"/>
                 <a:cs typeface="Amiri" pitchFamily="2" charset="-78"/>
               </a:rPr>
-              <a:t>Join a word from each lesson in one sentence with </a:t>
+              <a:t>Join a word from each lesson in one sentence with ‏</a:t>
             </a:r>
             <a:pPr algn="l" indent="0" marL="0">
               <a:buNone/>
@@ -33644,7 +33644,7 @@
                 <a:latin typeface="Calibri" pitchFamily="34" charset="0"/>
                 <a:cs typeface="Amiri" pitchFamily="2" charset="-78"/>
               </a:rPr>
-              <a:t> or </a:t>
+              <a:t>‏ or ‏</a:t>
             </a:r>
             <a:pPr algn="l" indent="0" marL="0">
               <a:buNone/>
@@ -33671,7 +33671,7 @@
                 <a:latin typeface="Calibri" pitchFamily="34" charset="0"/>
                 <a:cs typeface="Amiri" pitchFamily="2" charset="-78"/>
               </a:rPr>
-              <a:t>.</a:t>
+              <a:t>‏.</a:t>
             </a:r>
             <a:endParaRPr lang="en-US" sz="1150" dirty="0"/>
           </a:p>
